--- a/assets/pptx/catalog-289.pptx
+++ b/assets/pptx/catalog-289.pptx
@@ -3550,7 +3550,7 @@
                 <a:ea typeface="Ebrima"/>
                 <a:cs typeface="Ebrima"/>
               </a:rPr>
-              <a:t>ሙሽሮቹ ይላሉ ሙሽሮቹ ይላሉ (2x)</a:t>
+              <a:t>ሙሽሮቹ ይላሉ ሙሽሮቹ ይላሉ 2x</a:t>
             </a:r>
           </a:p>
         </p:txBody>
@@ -4003,7 +4003,7 @@
                 <a:ea typeface="Ebrima"/>
                 <a:cs typeface="Ebrima"/>
               </a:rPr>
-              <a:t>ሙሽሮቹ ይላሉ ሙሽሮቹ ይላሉ (2x)</a:t>
+              <a:t>ሙሽሮቹ ይላሉ ሙሽሮቹ ይላሉ 2x</a:t>
             </a:r>
           </a:p>
         </p:txBody>
@@ -4456,7 +4456,7 @@
                 <a:ea typeface="Ebrima"/>
                 <a:cs typeface="Ebrima"/>
               </a:rPr>
-              <a:t>ሙሽሮቹ ይላሉ ሙሽሮቹ ይላሉ (2x)</a:t>
+              <a:t>ሙሽሮቹ ይላሉ ሙሽሮቹ ይላሉ 2x</a:t>
             </a:r>
           </a:p>
         </p:txBody>
